--- a/decks/englang-p2/englang-p2_ch5_q5-forms.pptx
+++ b/decks/englang-p2/englang-p2_ch5_q5-forms.pptx
@@ -127,31 +127,31 @@
   <p:extLst>
     <p:ext uri="{521415D9-36F7-43E2-AB2F-B90AF26B5E84}">
       <p14:sectionLst xmlns:p14="http://schemas.microsoft.com/office/powerpoint/2010/main">
-        <p14:section name="Opening" id="{70a9a792-1a01-9096-d9d2-89ac3c89fd11}">
+        <p14:section name="Opening" id="{c9048b86-b9c6-2636-5264-d30ece29ee52}">
           <p14:sldIdLst>
             <p14:sldId id="256"/>
             <p14:sldId id="257"/>
           </p14:sldIdLst>
         </p14:section>
-        <p14:section name="Gate" id="{7e1c0bc9-4056-08d5-8986-873ef7cf3049}">
+        <p14:section name="Gate" id="{9bd51ecd-4e30-83c3-294b-a360d745e14b}">
           <p14:sldIdLst>
             <p14:sldId id="258"/>
             <p14:sldId id="259"/>
           </p14:sldIdLst>
         </p14:section>
-        <p14:section name="Pre-teach" id="{2f43d917-756d-869f-be65-dbb7304a232e}">
+        <p14:section name="Pre-teach" id="{a3919025-5387-d4ce-0b39-7ef910c9ef1b}">
           <p14:sldIdLst>
             <p14:sldId id="260"/>
             <p14:sldId id="261"/>
           </p14:sldIdLst>
         </p14:section>
-        <p14:section name="Read-along" id="{b44953b2-528a-a616-2579-aef10932d40b}">
+        <p14:section name="Read-along" id="{2940bfe5-cb89-03a0-e157-5479a45385f3}">
           <p14:sldIdLst>
             <p14:sldId id="262"/>
             <p14:sldId id="263"/>
           </p14:sldIdLst>
         </p14:section>
-        <p14:section name="Teach" id="{d7463ead-adaa-bc39-a415-95398ac60e12}">
+        <p14:section name="Teach" id="{e7093f2b-28ee-f034-784e-1b7b648b51d9}">
           <p14:sldIdLst>
             <p14:sldId id="264"/>
             <p14:sldId id="265"/>
@@ -160,7 +160,7 @@
             <p14:sldId id="268"/>
           </p14:sldIdLst>
         </p14:section>
-        <p14:section name="Routes" id="{05cc2139-2b83-fbb3-8db9-290dbbfe28fe}">
+        <p14:section name="Routes" id="{24561620-eba9-bb7c-db8b-572599f3b104}">
           <p14:sldIdLst>
             <p14:sldId id="269"/>
             <p14:sldId id="270"/>
@@ -168,12 +168,12 @@
             <p14:sldId id="272"/>
           </p14:sldIdLst>
         </p14:section>
-        <p14:section name="Close" id="{c5ef218f-2b20-43ce-c305-daeb429d0366}">
+        <p14:section name="Close" id="{08067d7f-c2d8-dcbc-2ee7-0db3eb561d66}">
           <p14:sldIdLst>
             <p14:sldId id="273"/>
           </p14:sldIdLst>
         </p14:section>
-        <p14:section name="Answers" id="{cff4a039-4474-8f6e-126a-2ca49d45e123}">
+        <p14:section name="Answers" id="{8b5c33c3-01ff-32ff-0121-5a3021179da5}">
           <p14:sldIdLst>
             <p14:sldId id="274"/>
             <p14:sldId id="275"/>
@@ -1423,7 +1423,7 @@
               <a:rPr lang="en-US" dirty="0"/>
               <a:t>Exit ticket — individual, silent, on a slip or mini-whiteboard. Recall before help: no notes, no lanes, no hints. Collect before pupils leave.
 Question: Which opening suits a formal letter to the editor arguing a point of view?
-Answer: C   Dear Editor, Last Saturday I queued for an hour in the rain to watch a tiger walk nine paces in one direction and nine in the other.. ‘Dear Editor,’ fixes the form at once, and the first sentence tells a small story with an argument inside it: formal, personal and already persuading.
+Answer: B   Dear Editor, Last Saturday I queued for an hour in the rain to watch a tiger walk nine paces in one direction and nine in the other.. ‘Dear Editor,’ fixes the form at once, and the first sentence tells a small story with an argument inside it: formal, personal and already persuading.
 Source of this question: module 3 task ("Open in the right register") from the manifest.
 Sort the slips: correct → ready to move on; incorrect → start next lesson in the pre-teach group, with the read-along and the Support lane. Same destination next time.</a:t>
             </a:r>
@@ -1696,7 +1696,7 @@
             <a:r>
               <a:rPr lang="en-US" dirty="0"/>
               <a:t>Answers — task 2: Form, audience, purpose from the task. Reveal the answer; pupils mark their own work in a different colour, then read the "why" together. Same destination for every lane, so one answer serves the whole class.
-Answer: B   Form: letter; audience: the school governors; purpose: to argue a point of view
+Answer: C   Form: letter; audience: the school governors; purpose: to argue a point of view
 Why: The task names the form (letter), the audience (governors) and the purpose (giving your views, which means arguing). Read it word by word.
 Ask a Support pupil to explain one step, and a Stretch pupil to share their extension.</a:t>
             </a:r>
@@ -1787,7 +1787,7 @@
             <a:r>
               <a:rPr lang="en-US" dirty="0"/>
               <a:t>Answers — exit ticket: Exit ticket. Reveal the answer; pupils mark their own work in a different colour, then read the "why" together. Same destination for every lane, so one answer serves the whole class.
-Answer: C   Dear Editor, Last Saturday I queued for an hour in the rain to watch a tiger walk nine paces in one direction and nine in the other.
+Answer: B   Dear Editor, Last Saturday I queued for an hour in the rain to watch a tiger walk nine paces in one direction and nine in the other.
 Why: ‘Dear Editor,’ fixes the form at once, and the first sentence tells a small story with an argument inside it: formal, personal and already persuading.
 Ask a Support pupil to explain one step, and a Stretch pupil to share their extension.</a:t>
             </a:r>
@@ -1878,9 +1878,9 @@
             <a:r>
               <a:rPr lang="en-US" dirty="0"/>
               <a:t>Do now — retrieval. Silent, no notes, no help: recall comes before any support. Give about four minutes.
-1. How many marks is Question 5 worth, and how are they split?  →  B   40: 24 for content and organisation, 16 for technical accuracy
+1. How many marks is Question 5 worth, and how are they split?  →  A   40: 24 for content and organisation, 16 for technical accuracy
 2. Non-fiction that passes information or opinion between people, such as a letter or a speech, is called ___ writing.  →  transactional
-3. Which sign-off is the safest formal choice for a letter to someone you do not know well?  →  C   Yours sincerely,
+3. Which sign-off is the safest formal choice for a letter to someone you do not know well?  →  A   Yours sincerely,
 Circulate: who gets 3/3 (Stretch route), 2/3 (Core), 0–1 (Support)? Use this to route pupils later in the lesson.</a:t>
             </a:r>
             <a:endParaRPr lang="en-US" dirty="0"/>
@@ -1970,9 +1970,9 @@
             <a:r>
               <a:rPr lang="en-US" dirty="0"/>
               <a:t>Answers — pupils mark their own in a different colour, then hands up for 3/3, 2/3, 1/3.
-1. B   40: 24 for content and organisation, 16 for technical accuracy. Question 5 is worth 40 marks: 24 for content and organisation (AO5) and 16 for technical accuracy (AO6).
+1. A   40: 24 for content and organisation, 16 for technical accuracy. Question 5 is worth 40 marks: 24 for content and organisation (AO5) and 16 for technical accuracy (AO6).
 2. transactional. Your teachers define transactional writing as non-fiction that communicates information between individuals or groups.
-3. C   Yours sincerely,. ‘Yours sincerely,’ is the most common formal sign-off; stick to it if unsure.
+3. A   Yours sincerely,. ‘Yours sincerely,’ is the most common formal sign-off; stick to it if unsure.
 Say the route each score points to: 3/3 Stretch, 2/3 Core, 0–1 Support. Pupils may choose to move up.</a:t>
             </a:r>
             <a:endParaRPr lang="en-US" dirty="0"/>
@@ -9736,7 +9736,7 @@
                 <a:ea typeface="Calibri" pitchFamily="34" charset="-122"/>
                 <a:cs typeface="Calibri" pitchFamily="34" charset="-120"/>
               </a:rPr>
-              <a:t>Form: article; audience: parents; purpose: to entertain</a:t>
+              <a:t>Form: speech; audience: pupils; purpose: to inform</a:t>
             </a:r>
             <a:endParaRPr lang="en-US" sz="2600" dirty="0"/>
           </a:p>
@@ -9773,7 +9773,7 @@
                 <a:ea typeface="Calibri" pitchFamily="34" charset="-122"/>
                 <a:cs typeface="Calibri" pitchFamily="34" charset="-120"/>
               </a:rPr>
-              <a:t>Form: letter; audience: the school governors; purpose: to argue a point of view</a:t>
+              <a:t>Form: article; audience: parents; purpose: to entertain</a:t>
             </a:r>
             <a:endParaRPr lang="en-US" sz="2600" dirty="0"/>
           </a:p>
@@ -9810,7 +9810,7 @@
                 <a:ea typeface="Calibri" pitchFamily="34" charset="-122"/>
                 <a:cs typeface="Calibri" pitchFamily="34" charset="-120"/>
               </a:rPr>
-              <a:t>Form: speech; audience: pupils; purpose: to inform</a:t>
+              <a:t>Form: letter; audience: the school governors; purpose: to argue a point of view</a:t>
             </a:r>
             <a:endParaRPr lang="en-US" sz="2600" dirty="0"/>
           </a:p>
@@ -11214,7 +11214,7 @@
                 <a:ea typeface="Calibri" pitchFamily="34" charset="-122"/>
                 <a:cs typeface="Calibri" pitchFamily="34" charset="-120"/>
               </a:rPr>
-              <a:t>Hey, so I was thinking about zoos the other day and, like, they are kind of rubbish.</a:t>
+              <a:t>In this letter I am going to write about zoos and give my opinion on them.</a:t>
             </a:r>
             <a:endParaRPr lang="en-US" sz="2000" dirty="0"/>
           </a:p>
@@ -11251,7 +11251,7 @@
                 <a:ea typeface="Calibri" pitchFamily="34" charset="-122"/>
                 <a:cs typeface="Calibri" pitchFamily="34" charset="-120"/>
               </a:rPr>
-              <a:t>In this letter I am going to write about zoos and give my opinion on them.</a:t>
+              <a:t>Dear Editor, Last Saturday I queued for an hour in the rain to watch a tiger walk nine paces in one direction and nine in the other.</a:t>
             </a:r>
             <a:endParaRPr lang="en-US" sz="2000" dirty="0"/>
           </a:p>
@@ -11288,7 +11288,7 @@
                 <a:ea typeface="Calibri" pitchFamily="34" charset="-122"/>
                 <a:cs typeface="Calibri" pitchFamily="34" charset="-120"/>
               </a:rPr>
-              <a:t>Dear Editor, Last Saturday I queued for an hour in the rain to watch a tiger walk nine paces in one direction and nine in the other.</a:t>
+              <a:t>Hey, so I was thinking about zoos the other day and, like, they are kind of rubbish.</a:t>
             </a:r>
             <a:endParaRPr lang="en-US" sz="2000" dirty="0"/>
           </a:p>
@@ -12752,7 +12752,7 @@
                 <a:ea typeface="Cambria" pitchFamily="34" charset="-122"/>
                 <a:cs typeface="Cambria" pitchFamily="34" charset="-120"/>
               </a:rPr>
-              <a:t>B   Form: letter; audience: the school governors; purpose: to argue a point of view</a:t>
+              <a:t>C   Form: letter; audience: the school governors; purpose: to argue a point of view</a:t>
             </a:r>
             <a:endParaRPr lang="en-US" sz="1800" dirty="0"/>
           </a:p>
@@ -13211,7 +13211,7 @@
                 <a:ea typeface="Cambria" pitchFamily="34" charset="-122"/>
                 <a:cs typeface="Cambria" pitchFamily="34" charset="-120"/>
               </a:rPr>
-              <a:t>C   Dear Editor, Last Saturday I queued for an hour in the rain to watch a tiger walk nine paces in one direction and nine in the other.</a:t>
+              <a:t>B   Dear Editor, Last Saturday I queued for an hour in the rain to watch a tiger walk nine paces in one direction and nine in the other.</a:t>
             </a:r>
             <a:endParaRPr lang="en-US" sz="1800" dirty="0"/>
           </a:p>
@@ -13745,7 +13745,7 @@
                 <a:ea typeface="Calibri" pitchFamily="34" charset="-122"/>
                 <a:cs typeface="Calibri" pitchFamily="34" charset="-120"/>
               </a:rPr>
-              <a:t>40: 20 for content, 20 for accuracy</a:t>
+              <a:t>40: 24 for content and organisation, 16 for technical accuracy</a:t>
             </a:r>
             <a:endParaRPr lang="en-US" sz="1800" dirty="0"/>
           </a:p>
@@ -13782,7 +13782,7 @@
                 <a:ea typeface="Calibri" pitchFamily="34" charset="-122"/>
                 <a:cs typeface="Calibri" pitchFamily="34" charset="-120"/>
               </a:rPr>
-              <a:t>40: 24 for content and organisation, 16 for technical accuracy</a:t>
+              <a:t>24: all for content</a:t>
             </a:r>
             <a:endParaRPr lang="en-US" sz="1800" dirty="0"/>
           </a:p>
@@ -13819,7 +13819,7 @@
                 <a:ea typeface="Calibri" pitchFamily="34" charset="-122"/>
                 <a:cs typeface="Calibri" pitchFamily="34" charset="-120"/>
               </a:rPr>
-              <a:t>24: all for content</a:t>
+              <a:t>40: 20 for content, 20 for accuracy</a:t>
             </a:r>
             <a:endParaRPr lang="en-US" sz="1800" dirty="0"/>
           </a:p>
@@ -14258,7 +14258,7 @@
                 <a:ea typeface="Calibri" pitchFamily="34" charset="-122"/>
                 <a:cs typeface="Calibri" pitchFamily="34" charset="-120"/>
               </a:rPr>
-              <a:t>With love,</a:t>
+              <a:t>Yours sincerely,</a:t>
             </a:r>
             <a:endParaRPr lang="en-US" sz="2200" dirty="0"/>
           </a:p>
@@ -14295,7 +14295,7 @@
                 <a:ea typeface="Calibri" pitchFamily="34" charset="-122"/>
                 <a:cs typeface="Calibri" pitchFamily="34" charset="-120"/>
               </a:rPr>
-              <a:t>Kind regards,</a:t>
+              <a:t>See you soon,</a:t>
             </a:r>
             <a:endParaRPr lang="en-US" sz="2200" dirty="0"/>
           </a:p>
@@ -14332,7 +14332,7 @@
                 <a:ea typeface="Calibri" pitchFamily="34" charset="-122"/>
                 <a:cs typeface="Calibri" pitchFamily="34" charset="-120"/>
               </a:rPr>
-              <a:t>Yours sincerely,</a:t>
+              <a:t>With love,</a:t>
             </a:r>
             <a:endParaRPr lang="en-US" sz="2200" dirty="0"/>
           </a:p>
@@ -14369,7 +14369,7 @@
                 <a:ea typeface="Calibri" pitchFamily="34" charset="-122"/>
                 <a:cs typeface="Calibri" pitchFamily="34" charset="-120"/>
               </a:rPr>
-              <a:t>See you soon,</a:t>
+              <a:t>Kind regards,</a:t>
             </a:r>
             <a:endParaRPr lang="en-US" sz="2200" dirty="0"/>
           </a:p>
@@ -14770,7 +14770,7 @@
                 <a:ea typeface="Calibri" pitchFamily="34" charset="-122"/>
                 <a:cs typeface="Calibri" pitchFamily="34" charset="-120"/>
               </a:rPr>
-              <a:t>B   40: 24 for content and organisation, 16 for technical accuracy</a:t>
+              <a:t>A   40: 24 for content and organisation, 16 for technical accuracy</a:t>
             </a:r>
             <a:endParaRPr lang="en-US" sz="2200" dirty="0"/>
           </a:p>
@@ -15250,7 +15250,7 @@
                 <a:ea typeface="Calibri" pitchFamily="34" charset="-122"/>
                 <a:cs typeface="Calibri" pitchFamily="34" charset="-120"/>
               </a:rPr>
-              <a:t>C   Yours sincerely,</a:t>
+              <a:t>A   Yours sincerely,</a:t>
             </a:r>
             <a:endParaRPr lang="en-US" sz="2200" dirty="0"/>
           </a:p>

--- a/decks/englang-p2/englang-p2_ch5_q5-forms.pptx
+++ b/decks/englang-p2/englang-p2_ch5_q5-forms.pptx
@@ -127,31 +127,31 @@
   <p:extLst>
     <p:ext uri="{521415D9-36F7-43E2-AB2F-B90AF26B5E84}">
       <p14:sectionLst xmlns:p14="http://schemas.microsoft.com/office/powerpoint/2010/main">
-        <p14:section name="Opening" id="{c9048b86-b9c6-2636-5264-d30ece29ee52}">
+        <p14:section name="Opening" id="{e99b03b6-2619-a519-12a9-2240c5ec35c1}">
           <p14:sldIdLst>
             <p14:sldId id="256"/>
             <p14:sldId id="257"/>
           </p14:sldIdLst>
         </p14:section>
-        <p14:section name="Gate" id="{9bd51ecd-4e30-83c3-294b-a360d745e14b}">
+        <p14:section name="Gate" id="{6f65f784-9aa4-09b1-1030-628d7440a453}">
           <p14:sldIdLst>
             <p14:sldId id="258"/>
             <p14:sldId id="259"/>
           </p14:sldIdLst>
         </p14:section>
-        <p14:section name="Pre-teach" id="{a3919025-5387-d4ce-0b39-7ef910c9ef1b}">
+        <p14:section name="Pre-teach" id="{488e453b-6757-97e2-bd31-bbcf1a54398c}">
           <p14:sldIdLst>
             <p14:sldId id="260"/>
             <p14:sldId id="261"/>
           </p14:sldIdLst>
         </p14:section>
-        <p14:section name="Read-along" id="{2940bfe5-cb89-03a0-e157-5479a45385f3}">
+        <p14:section name="Read-along" id="{f2061e87-1127-9706-5715-9fa1d2416473}">
           <p14:sldIdLst>
             <p14:sldId id="262"/>
             <p14:sldId id="263"/>
           </p14:sldIdLst>
         </p14:section>
-        <p14:section name="Teach" id="{e7093f2b-28ee-f034-784e-1b7b648b51d9}">
+        <p14:section name="Teach" id="{a06e98c2-8b3a-dd0d-e667-7822f8235017}">
           <p14:sldIdLst>
             <p14:sldId id="264"/>
             <p14:sldId id="265"/>
@@ -160,7 +160,7 @@
             <p14:sldId id="268"/>
           </p14:sldIdLst>
         </p14:section>
-        <p14:section name="Routes" id="{24561620-eba9-bb7c-db8b-572599f3b104}">
+        <p14:section name="Routes" id="{60c74c1d-eb72-a6f5-98e2-e6cbdfa31050}">
           <p14:sldIdLst>
             <p14:sldId id="269"/>
             <p14:sldId id="270"/>
@@ -168,12 +168,12 @@
             <p14:sldId id="272"/>
           </p14:sldIdLst>
         </p14:section>
-        <p14:section name="Close" id="{08067d7f-c2d8-dcbc-2ee7-0db3eb561d66}">
+        <p14:section name="Close" id="{44da7134-4ff1-b621-0a13-2c4cf524243b}">
           <p14:sldIdLst>
             <p14:sldId id="273"/>
           </p14:sldIdLst>
         </p14:section>
-        <p14:section name="Answers" id="{8b5c33c3-01ff-32ff-0121-5a3021179da5}">
+        <p14:section name="Answers" id="{2e2565d7-92ae-dba8-ee82-5d820158e1c6}">
           <p14:sldIdLst>
             <p14:sldId id="274"/>
             <p14:sldId id="275"/>
